--- a/代码/figures/论文数据图/问题二/第二问_方法流程图.pptx
+++ b/代码/figures/论文数据图/问题二/第二问_方法流程图.pptx
@@ -861,29 +861,8 @@
                 <a:latin typeface="Microsoft YaHei"/>
                 <a:ea typeface="Microsoft YaHei"/>
               </a:rPr>
-              <a:t>全天计划</a:t>
-            </a:r>
-            <a:r>
-              <a:rPr lang="en-US" sz="1125" b="1">
-                <a:solidFill>
-                  <a:srgbClr val="3D7BD9"/>
-                </a:solidFill>
-                <a:latin typeface="Microsoft YaHei"/>
-                <a:ea typeface="Microsoft YaHei"/>
-              </a:rPr>
-              <a:t> g_d </a:t>
-            </a:r>
-            <a:r>
-              <a:rPr lang="zh-CN" sz="1125" b="1">
-                <a:solidFill>
-                  <a:srgbClr val="3D7BD9"/>
-                </a:solidFill>
-                <a:latin typeface="Microsoft YaHei"/>
-                <a:ea typeface="Microsoft YaHei"/>
-              </a:rPr>
-              <a:t>固定不变</a:t>
-            </a:r>
-            <a:endParaRPr/>
+              <a:t>全天购电计划固定不变</a:t>
+            </a:r>
           </a:p>
         </p:txBody>
       </p:sp>
@@ -1767,59 +1746,8 @@
                 <a:latin typeface="Microsoft YaHei"/>
                 <a:ea typeface="Microsoft YaHei"/>
               </a:rPr>
-              <a:t>以</a:t>
-            </a:r>
-            <a:r>
-              <a:rPr lang="en-US" sz="1125">
-                <a:solidFill>
-                  <a:srgbClr val="4A5568"/>
-                </a:solidFill>
-                <a:latin typeface="Microsoft YaHei"/>
-                <a:ea typeface="Microsoft YaHei"/>
-              </a:rPr>
-              <a:t> 80 </a:t>
-            </a:r>
-            <a:r>
-              <a:rPr lang="zh-CN" sz="1125">
-                <a:solidFill>
-                  <a:srgbClr val="4A5568"/>
-                </a:solidFill>
-                <a:latin typeface="Microsoft YaHei"/>
-                <a:ea typeface="Microsoft YaHei"/>
-              </a:rPr>
-              <a:t>分位净需求为确定性输入，最小化购电费</a:t>
-            </a:r>
-            <a:r>
-              <a:rPr lang="en-US" sz="1125">
-                <a:solidFill>
-                  <a:srgbClr val="4A5568"/>
-                </a:solidFill>
-                <a:latin typeface="Microsoft YaHei"/>
-                <a:ea typeface="Microsoft YaHei"/>
-              </a:rPr>
-              <a:t> Σ p_t g_t</a:t>
-            </a:r>
-            <a:r>
-              <a:rPr lang="zh-CN" sz="1125">
-                <a:solidFill>
-                  <a:srgbClr val="4A5568"/>
-                </a:solidFill>
-                <a:latin typeface="Microsoft YaHei"/>
-                <a:ea typeface="Microsoft YaHei"/>
-              </a:rPr>
-              <a:t>；含库存与功率约束；输出全天普通购电计划</a:t>
-            </a:r>
-            <a:r>
-              <a:rPr lang="en-US" sz="1125">
-                <a:solidFill>
-                  <a:srgbClr val="4A5568"/>
-                </a:solidFill>
-                <a:latin typeface="Microsoft YaHei"/>
-                <a:ea typeface="Microsoft YaHei"/>
-              </a:rPr>
-              <a:t> g_d</a:t>
-            </a:r>
-            <a:endParaRPr/>
+              <a:t>以第八十分位净需求为输入，最小化购电费用；满足库存与功率约束，输出全天普通购电计划。</a:t>
+            </a:r>
           </a:p>
         </p:txBody>
       </p:sp>
@@ -1981,89 +1909,8 @@
                 <a:latin typeface="Microsoft YaHei"/>
                 <a:ea typeface="Microsoft YaHei"/>
               </a:rPr>
-              <a:t>标准化误差按</a:t>
-            </a:r>
-            <a:r>
-              <a:rPr lang="en-US" sz="1125">
-                <a:solidFill>
-                  <a:srgbClr val="4A5568"/>
-                </a:solidFill>
-                <a:latin typeface="Microsoft YaHei"/>
-                <a:ea typeface="Microsoft YaHei"/>
-              </a:rPr>
-              <a:t> ±0.84 </a:t>
-            </a:r>
-            <a:r>
-              <a:rPr lang="zh-CN" sz="1125">
-                <a:solidFill>
-                  <a:srgbClr val="4A5568"/>
-                </a:solidFill>
-                <a:latin typeface="Microsoft YaHei"/>
-                <a:ea typeface="Microsoft YaHei"/>
-              </a:rPr>
-              <a:t>分为三态；全局计数加</a:t>
-            </a:r>
-            <a:r>
-              <a:rPr lang="en-US" sz="1125">
-                <a:solidFill>
-                  <a:srgbClr val="4A5568"/>
-                </a:solidFill>
-                <a:latin typeface="Microsoft YaHei"/>
-                <a:ea typeface="Microsoft YaHei"/>
-              </a:rPr>
-              <a:t> 1 </a:t>
-            </a:r>
-            <a:r>
-              <a:rPr lang="zh-CN" sz="1125">
-                <a:solidFill>
-                  <a:srgbClr val="4A5568"/>
-                </a:solidFill>
-                <a:latin typeface="Microsoft YaHei"/>
-                <a:ea typeface="Microsoft YaHei"/>
-              </a:rPr>
-              <a:t>平滑，再用前后各</a:t>
-            </a:r>
-            <a:r>
-              <a:rPr lang="en-US" sz="1125">
-                <a:solidFill>
-                  <a:srgbClr val="4A5568"/>
-                </a:solidFill>
-                <a:latin typeface="Microsoft YaHei"/>
-                <a:ea typeface="Microsoft YaHei"/>
-              </a:rPr>
-              <a:t> 3 </a:t>
-            </a:r>
-            <a:r>
-              <a:rPr lang="zh-CN" sz="1125">
-                <a:solidFill>
-                  <a:srgbClr val="4A5568"/>
-                </a:solidFill>
-                <a:latin typeface="Microsoft YaHei"/>
-                <a:ea typeface="Microsoft YaHei"/>
-              </a:rPr>
-              <a:t>时段局部计数修正；类内最多</a:t>
-            </a:r>
-            <a:r>
-              <a:rPr lang="en-US" sz="1125">
-                <a:solidFill>
-                  <a:srgbClr val="4A5568"/>
-                </a:solidFill>
-                <a:latin typeface="Microsoft YaHei"/>
-                <a:ea typeface="Microsoft YaHei"/>
-              </a:rPr>
-              <a:t> 7 </a:t>
-            </a:r>
-            <a:r>
-              <a:rPr lang="zh-CN" sz="1125">
-                <a:solidFill>
-                  <a:srgbClr val="4A5568"/>
-                </a:solidFill>
-                <a:latin typeface="Microsoft YaHei"/>
-                <a:ea typeface="Microsoft YaHei"/>
-              </a:rPr>
-              <a:t>个加权样本</a:t>
-            </a:r>
-            <a:endParaRPr/>
+              <a:t>标准化误差按上下阈值分为三态；全局计数平滑，再用相邻时段局部计数修正；类内最多七个加权样本。</a:t>
+            </a:r>
           </a:p>
         </p:txBody>
       </p:sp>
@@ -2245,79 +2092,8 @@
                 <a:latin typeface="Microsoft YaHei"/>
                 <a:ea typeface="Microsoft YaHei"/>
               </a:rPr>
-              <a:t>161 </a:t>
-            </a:r>
-            <a:r>
-              <a:rPr lang="zh-CN" sz="1125">
-                <a:solidFill>
-                  <a:srgbClr val="4A5568"/>
-                </a:solidFill>
-                <a:latin typeface="Microsoft YaHei"/>
-                <a:ea typeface="Microsoft YaHei"/>
-              </a:rPr>
-              <a:t>点库存网格求价值函数</a:t>
-            </a:r>
-            <a:r>
-              <a:rPr lang="en-US" sz="1125">
-                <a:solidFill>
-                  <a:srgbClr val="4A5568"/>
-                </a:solidFill>
-                <a:latin typeface="Microsoft YaHei"/>
-                <a:ea typeface="Microsoft YaHei"/>
-              </a:rPr>
-              <a:t> W_t(x,i)</a:t>
-            </a:r>
-            <a:r>
-              <a:rPr lang="zh-CN" sz="1125">
-                <a:solidFill>
-                  <a:srgbClr val="4A5568"/>
-                </a:solidFill>
-                <a:latin typeface="Microsoft YaHei"/>
-                <a:ea typeface="Microsoft YaHei"/>
-              </a:rPr>
-              <a:t>，终端系数</a:t>
-            </a:r>
-            <a:r>
-              <a:rPr lang="en-US" sz="1125">
-                <a:solidFill>
-                  <a:srgbClr val="4A5568"/>
-                </a:solidFill>
-                <a:latin typeface="Microsoft YaHei"/>
-                <a:ea typeface="Microsoft YaHei"/>
-              </a:rPr>
-              <a:t> κ = 0</a:t>
-            </a:r>
-            <a:r>
-              <a:rPr lang="zh-CN" sz="1125">
-                <a:solidFill>
-                  <a:srgbClr val="4A5568"/>
-                </a:solidFill>
-                <a:latin typeface="Microsoft YaHei"/>
-                <a:ea typeface="Microsoft YaHei"/>
-              </a:rPr>
-              <a:t>；每</a:t>
-            </a:r>
-            <a:r>
-              <a:rPr lang="en-US" sz="1125">
-                <a:solidFill>
-                  <a:srgbClr val="4A5568"/>
-                </a:solidFill>
-                <a:latin typeface="Microsoft YaHei"/>
-                <a:ea typeface="Microsoft YaHei"/>
-              </a:rPr>
-              <a:t> 10 </a:t>
-            </a:r>
-            <a:r>
-              <a:rPr lang="zh-CN" sz="1125">
-                <a:solidFill>
-                  <a:srgbClr val="4A5568"/>
-                </a:solidFill>
-                <a:latin typeface="Microsoft YaHei"/>
-                <a:ea typeface="Microsoft YaHei"/>
-              </a:rPr>
-              <a:t>分钟读实测，富余则充电或弃用，缺口则放电＋应急购电</a:t>
-            </a:r>
-            <a:endParaRPr/>
+              <a:t>在库存网格上计算价值函数，终端价值设为零；每十分钟读取实测，富余时充电或弃用，缺口时择优放电并紧急购电。</a:t>
+            </a:r>
           </a:p>
         </p:txBody>
       </p:sp>
@@ -2418,89 +2194,8 @@
                 <a:latin typeface="Microsoft YaHei"/>
                 <a:ea typeface="Microsoft YaHei"/>
               </a:rPr>
-              <a:t>储能</a:t>
-            </a:r>
-            <a:r>
-              <a:rPr lang="en-US" sz="1050">
-                <a:solidFill>
-                  <a:srgbClr val="4A5568"/>
-                </a:solidFill>
-                <a:latin typeface="Microsoft YaHei"/>
-                <a:ea typeface="Microsoft YaHei"/>
-              </a:rPr>
-              <a:t> 1200—10800 kWh</a:t>
-            </a:r>
-            <a:r>
-              <a:rPr lang="zh-CN" sz="1050">
-                <a:solidFill>
-                  <a:srgbClr val="4A5568"/>
-                </a:solidFill>
-                <a:latin typeface="Microsoft YaHei"/>
-                <a:ea typeface="Microsoft YaHei"/>
-              </a:rPr>
-              <a:t>；充放电功率</a:t>
-            </a:r>
-            <a:r>
-              <a:rPr lang="en-US" sz="1050">
-                <a:solidFill>
-                  <a:srgbClr val="4A5568"/>
-                </a:solidFill>
-                <a:latin typeface="Microsoft YaHei"/>
-                <a:ea typeface="Microsoft YaHei"/>
-              </a:rPr>
-              <a:t> ≤5000 kW</a:t>
-            </a:r>
-            <a:r>
-              <a:rPr lang="zh-CN" sz="1050">
-                <a:solidFill>
-                  <a:srgbClr val="4A5568"/>
-                </a:solidFill>
-                <a:latin typeface="Microsoft YaHei"/>
-                <a:ea typeface="Microsoft YaHei"/>
-              </a:rPr>
-              <a:t>，效率均</a:t>
-            </a:r>
-            <a:r>
-              <a:rPr lang="en-US" sz="1050">
-                <a:solidFill>
-                  <a:srgbClr val="4A5568"/>
-                </a:solidFill>
-                <a:latin typeface="Microsoft YaHei"/>
-                <a:ea typeface="Microsoft YaHei"/>
-              </a:rPr>
-              <a:t> 0.9</a:t>
-            </a:r>
-            <a:r>
-              <a:rPr lang="zh-CN" sz="1050">
-                <a:solidFill>
-                  <a:srgbClr val="4A5568"/>
-                </a:solidFill>
-                <a:latin typeface="Microsoft YaHei"/>
-                <a:ea typeface="Microsoft YaHei"/>
-              </a:rPr>
-              <a:t>；应急购电按</a:t>
-            </a:r>
-            <a:r>
-              <a:rPr lang="en-US" sz="1050">
-                <a:solidFill>
-                  <a:srgbClr val="4A5568"/>
-                </a:solidFill>
-                <a:latin typeface="Microsoft YaHei"/>
-                <a:ea typeface="Microsoft YaHei"/>
-              </a:rPr>
-              <a:t> 5 </a:t>
-            </a:r>
-            <a:r>
-              <a:rPr lang="zh-CN" sz="1050">
-                <a:solidFill>
-                  <a:srgbClr val="4A5568"/>
-                </a:solidFill>
-                <a:latin typeface="Microsoft YaHei"/>
-                <a:ea typeface="Microsoft YaHei"/>
-              </a:rPr>
-              <a:t>倍电价结算；决策只用当前与过去观测；不强制日末电量回到日初，日末库存作为次日日初连续接续。</a:t>
-            </a:r>
-            <a:endParaRPr/>
+              <a:t>储电量与充放电功率受边界约束，计入充放电损耗；紧急购电按五倍电价结算。决策只用当前与过去观测，日末库存连续传递至次日。</a:t>
+            </a:r>
           </a:p>
         </p:txBody>
       </p:sp>
@@ -2601,49 +2296,8 @@
                 <a:latin typeface="Microsoft YaHei"/>
                 <a:ea typeface="Microsoft YaHei"/>
               </a:rPr>
-              <a:t>全天普通购电计划</a:t>
-            </a:r>
-            <a:r>
-              <a:rPr lang="en-US" sz="1050">
-                <a:solidFill>
-                  <a:srgbClr val="4A5568"/>
-                </a:solidFill>
-                <a:latin typeface="Microsoft YaHei"/>
-                <a:ea typeface="Microsoft YaHei"/>
-              </a:rPr>
-              <a:t> g_d</a:t>
-            </a:r>
-            <a:r>
-              <a:rPr lang="zh-CN" sz="1050">
-                <a:solidFill>
-                  <a:srgbClr val="4A5568"/>
-                </a:solidFill>
-                <a:latin typeface="Microsoft YaHei"/>
-                <a:ea typeface="Microsoft YaHei"/>
-              </a:rPr>
-              <a:t>、充放电轨迹、应急购电记录、逐时</a:t>
-            </a:r>
-            <a:r>
-              <a:rPr lang="en-US" sz="1050">
-                <a:solidFill>
-                  <a:srgbClr val="4A5568"/>
-                </a:solidFill>
-                <a:latin typeface="Microsoft YaHei"/>
-                <a:ea typeface="Microsoft YaHei"/>
-              </a:rPr>
-              <a:t> SOC </a:t>
-            </a:r>
-            <a:r>
-              <a:rPr lang="zh-CN" sz="1050">
-                <a:solidFill>
-                  <a:srgbClr val="4A5568"/>
-                </a:solidFill>
-                <a:latin typeface="Microsoft YaHei"/>
-                <a:ea typeface="Microsoft YaHei"/>
-              </a:rPr>
-              <a:t>与逐日费用，用于全年账单核算与方案对比。</a:t>
-            </a:r>
-            <a:endParaRPr/>
+              <a:t>全天普通购电计划、充放电轨迹、紧急购电记录、逐时库存与逐日费用，用于全年账单核算与方案对比。</a:t>
+            </a:r>
           </a:p>
         </p:txBody>
       </p:sp>
